--- a/docs/links-26/presentations/Second-Sight-for-colleagues.pptx
+++ b/docs/links-26/presentations/Second-Sight-for-colleagues.pptx
@@ -1308,7 +1308,7 @@
           <a:p>
             <a:r>
               <a:rPr lang="en-US" dirty="0"/>
-              <a:t>Monday to Saturday, counting a cover week as four days worked, the same way the clerks do. Sundays are overtime by agreement, so they are not in these figures — today or in Second Sight. Exactly, Second Sight works out at 218.6 days a year: just under today’s 219, which is also the most the 26-week link is allowed (agreed 1 October 2026). The average shift is two minutes longer, which is on slide 6.</a:t>
+              <a:t>Monday to Saturday, counting a cover week as four days worked, the same way the clerks do. Sundays are overtime by agreement, so they are not in these figures — today or in Second Sight. Exactly, Second Sight works out at 218.6 days a year: just under today’s 219, which is also the most the 26-week link is allowed (agreed 1 October 2026). The average shift is about two minutes longer, which is on slide 6.</a:t>
             </a:r>
             <a:endParaRPr lang="en-US" dirty="0"/>
           </a:p>
@@ -4977,7 +4977,7 @@
                 <a:ea typeface="Inter" pitchFamily="34" charset="-122"/>
                 <a:cs typeface="Inter" pitchFamily="34" charset="-120"/>
               </a:rPr>
-              <a:t>Shifts 2 minutes longer on average</a:t>
+              <a:t>Shifts about 2 minutes longer on average</a:t>
             </a:r>
             <a:endParaRPr lang="en-US" sz="1400" dirty="0"/>
           </a:p>
@@ -11424,7 +11424,7 @@
                 <a:ea typeface="Inter" pitchFamily="34" charset="-122"/>
                 <a:cs typeface="Inter" pitchFamily="34" charset="-120"/>
               </a:rPr>
-              <a:t>Every closing shift gets shorter — the average goes up two minutes</a:t>
+              <a:t>Every closing shift gets shorter — the average goes up about two minutes</a:t>
             </a:r>
             <a:endParaRPr lang="en-US" sz="1500" dirty="0"/>
           </a:p>
